--- a/강의자료/09차시_def_return.pptx
+++ b/강의자료/09차시_def_return.pptx
@@ -6767,12 +6767,12 @@
         </p:nvSpPr>
         <p:spPr>
           <a:xfrm>
-            <a:off x="457200" y="3429000"/>
-            <a:ext cx="8229600" cy="1234440"/>
+            <a:off x="457200" y="3108960"/>
+            <a:ext cx="8229600" cy="1554480"/>
           </a:xfrm>
           <a:prstGeom prst="roundRect">
             <a:avLst>
-              <a:gd name="adj" fmla="val 5926"/>
+              <a:gd name="adj" fmla="val 4706"/>
             </a:avLst>
           </a:prstGeom>
           <a:solidFill>
@@ -6794,8 +6794,8 @@
         </p:nvSpPr>
         <p:spPr>
           <a:xfrm>
-            <a:off x="621792" y="3538728"/>
-            <a:ext cx="7900416" cy="1014984"/>
+            <a:off x="621792" y="3218688"/>
+            <a:ext cx="7900416" cy="1335024"/>
           </a:xfrm>
           <a:prstGeom prst="rect">
             <a:avLst/>
@@ -6814,7 +6814,7 @@
               <a:buNone/>
             </a:pPr>
             <a:r>
-              <a:rPr lang="en-US" sz="1459" b="1" dirty="0">
+              <a:rPr lang="en-US" sz="1600" b="1" dirty="0">
                 <a:solidFill>
                   <a:srgbClr val="93C5FD"/>
                 </a:solidFill>
@@ -6831,7 +6831,7 @@
               <a:buNone/>
             </a:pPr>
             <a:r>
-              <a:rPr lang="en-US" sz="1459" dirty="0">
+              <a:rPr lang="en-US" sz="1600" dirty="0">
                 <a:solidFill>
                   <a:srgbClr val="E5E7EB"/>
                 </a:solidFill>
@@ -6847,17 +6847,17 @@
               </a:lnSpc>
               <a:buNone/>
             </a:pPr>
-            <a:endParaRPr lang="en-US" sz="1459" dirty="0"/>
-          </a:p>
-          <a:p>
-            <a:pPr indent="0" marL="0">
-              <a:lnSpc>
-                <a:spcPct val="115000"/>
-              </a:lnSpc>
-              <a:buNone/>
-            </a:pPr>
-            <a:r>
-              <a:rPr lang="en-US" sz="1459" dirty="0">
+            <a:endParaRPr lang="en-US" sz="1600" dirty="0"/>
+          </a:p>
+          <a:p>
+            <a:pPr indent="0" marL="0">
+              <a:lnSpc>
+                <a:spcPct val="115000"/>
+              </a:lnSpc>
+              <a:buNone/>
+            </a:pPr>
+            <a:r>
+              <a:rPr lang="en-US" sz="1600" dirty="0">
                 <a:solidFill>
                   <a:srgbClr val="E5E7EB"/>
                 </a:solidFill>
@@ -6874,7 +6874,7 @@
               <a:buNone/>
             </a:pPr>
             <a:r>
-              <a:rPr lang="en-US" sz="1459" b="1" dirty="0">
+              <a:rPr lang="en-US" sz="1600" b="1" dirty="0">
                 <a:solidFill>
                   <a:srgbClr val="93C5FD"/>
                 </a:solidFill>
@@ -6891,7 +6891,7 @@
               <a:buNone/>
             </a:pPr>
             <a:r>
-              <a:rPr lang="en-US" sz="1459" dirty="0">
+              <a:rPr lang="en-US" sz="1600" dirty="0">
                 <a:solidFill>
                   <a:srgbClr val="E5E7EB"/>
                 </a:solidFill>
@@ -6907,17 +6907,17 @@
               </a:lnSpc>
               <a:buNone/>
             </a:pPr>
-            <a:endParaRPr lang="en-US" sz="1459" dirty="0"/>
-          </a:p>
-          <a:p>
-            <a:pPr indent="0" marL="0">
-              <a:lnSpc>
-                <a:spcPct val="115000"/>
-              </a:lnSpc>
-              <a:buNone/>
-            </a:pPr>
-            <a:r>
-              <a:rPr lang="en-US" sz="1459" dirty="0">
+            <a:endParaRPr lang="en-US" sz="1600" dirty="0"/>
+          </a:p>
+          <a:p>
+            <a:pPr indent="0" marL="0">
+              <a:lnSpc>
+                <a:spcPct val="115000"/>
+              </a:lnSpc>
+              <a:buNone/>
+            </a:pPr>
+            <a:r>
+              <a:rPr lang="en-US" sz="1600" dirty="0">
                 <a:solidFill>
                   <a:srgbClr val="E5E7EB"/>
                 </a:solidFill>
@@ -6933,17 +6933,17 @@
               </a:lnSpc>
               <a:buNone/>
             </a:pPr>
-            <a:endParaRPr lang="en-US" sz="1459" dirty="0"/>
-          </a:p>
-          <a:p>
-            <a:pPr indent="0" marL="0">
-              <a:lnSpc>
-                <a:spcPct val="115000"/>
-              </a:lnSpc>
-              <a:buNone/>
-            </a:pPr>
-            <a:r>
-              <a:rPr lang="en-US" sz="1459" b="1" dirty="0">
+            <a:endParaRPr lang="en-US" sz="1600" dirty="0"/>
+          </a:p>
+          <a:p>
+            <a:pPr indent="0" marL="0">
+              <a:lnSpc>
+                <a:spcPct val="115000"/>
+              </a:lnSpc>
+              <a:buNone/>
+            </a:pPr>
+            <a:r>
+              <a:rPr lang="en-US" sz="1600" b="1" dirty="0">
                 <a:solidFill>
                   <a:srgbClr val="93C5FD"/>
                 </a:solidFill>
@@ -6960,7 +6960,7 @@
               <a:buNone/>
             </a:pPr>
             <a:r>
-              <a:rPr lang="en-US" sz="1459" dirty="0">
+              <a:rPr lang="en-US" sz="1600" dirty="0">
                 <a:solidFill>
                   <a:srgbClr val="E5E7EB"/>
                 </a:solidFill>
@@ -6977,7 +6977,7 @@
               <a:buNone/>
             </a:pPr>
             <a:r>
-              <a:rPr lang="en-US" sz="1459" b="1" dirty="0">
+              <a:rPr lang="en-US" sz="1600" b="1" dirty="0">
                 <a:solidFill>
                   <a:srgbClr val="93C5FD"/>
                 </a:solidFill>
@@ -6987,7 +6987,7 @@
               </a:rPr>
               <a:t>None</a:t>
             </a:r>
-            <a:endParaRPr lang="en-US" sz="1459" dirty="0"/>
+            <a:endParaRPr lang="en-US" sz="1600" dirty="0"/>
           </a:p>
         </p:txBody>
       </p:sp>

--- a/강의자료/09차시_def_return.pptx
+++ b/강의자료/09차시_def_return.pptx
@@ -6436,7 +6436,7 @@
         <p:spPr>
           <a:xfrm>
             <a:off x="457200" y="1965960"/>
-            <a:ext cx="2590800" cy="1097280"/>
+            <a:ext cx="2590800" cy="1417320"/>
           </a:xfrm>
           <a:prstGeom prst="rect">
             <a:avLst/>
@@ -6581,7 +6581,7 @@
         <p:spPr>
           <a:xfrm>
             <a:off x="3276600" y="1965960"/>
-            <a:ext cx="2590800" cy="1097280"/>
+            <a:ext cx="2590800" cy="1417320"/>
           </a:xfrm>
           <a:prstGeom prst="rect">
             <a:avLst/>
@@ -6726,7 +6726,7 @@
         <p:spPr>
           <a:xfrm>
             <a:off x="6096000" y="1965960"/>
-            <a:ext cx="2590800" cy="1097280"/>
+            <a:ext cx="2590800" cy="1417320"/>
           </a:xfrm>
           <a:prstGeom prst="rect">
             <a:avLst/>
@@ -7237,7 +7237,7 @@
                 <a:ea typeface="Malgun Gothic" pitchFamily="34" charset="-122"/>
                 <a:cs typeface="Malgun Gothic" pitchFamily="34" charset="-120"/>
               </a:rPr>
-              <a:t>STEP 1 조립</a:t>
+              <a:t>STEP 1 코드 소환</a:t>
             </a:r>
             <a:endParaRPr lang="en-US" sz="1400" dirty="0"/>
           </a:p>
@@ -7252,7 +7252,7 @@
         <p:spPr>
           <a:xfrm>
             <a:off x="457200" y="1874520"/>
-            <a:ext cx="2590800" cy="1097280"/>
+            <a:ext cx="2590800" cy="1417320"/>
           </a:xfrm>
           <a:prstGeom prst="rect">
             <a:avLst/>
@@ -7279,7 +7279,7 @@
                 <a:ea typeface="Malgun Gothic" pitchFamily="34" charset="-122"/>
                 <a:cs typeface="Malgun Gothic" pitchFamily="34" charset="-120"/>
               </a:rPr>
-              <a:t>기본 원가(price)와 세율(tax_rate)을 고르고 calculate_price 를 조립한다.</a:t>
+              <a:t>「def &amp; return 커스텀 계산기 조립」 버튼 → calculate_price 함수 정의와 호출 코드가 나타난다.</a:t>
             </a:r>
             <a:endParaRPr lang="en-US" sz="1200" dirty="0"/>
           </a:p>
@@ -7382,7 +7382,7 @@
                 <a:ea typeface="Malgun Gothic" pitchFamily="34" charset="-122"/>
                 <a:cs typeface="Malgun Gothic" pitchFamily="34" charset="-120"/>
               </a:rPr>
-              <a:t>STEP 2 예측</a:t>
+              <a:t>STEP 2 파라미터 적용</a:t>
             </a:r>
             <a:endParaRPr lang="en-US" sz="1400" dirty="0"/>
           </a:p>
@@ -7397,7 +7397,7 @@
         <p:spPr>
           <a:xfrm>
             <a:off x="3276600" y="1874520"/>
-            <a:ext cx="2590800" cy="1097280"/>
+            <a:ext cx="2590800" cy="1417320"/>
           </a:xfrm>
           <a:prstGeom prst="rect">
             <a:avLst/>
@@ -7424,7 +7424,7 @@
                 <a:ea typeface="Malgun Gothic" pitchFamily="34" charset="-122"/>
                 <a:cs typeface="Malgun Gothic" pitchFamily="34" charset="-120"/>
               </a:rPr>
-              <a:t>세율 0.15, 원가 50000이면 최종 금액은? 실행 전에 계산.</a:t>
+              <a:t>기본 원가(10000·25000·50000)와 세율(0.05~0.20)을 고르고 「파라미터 적용」. 최종 금액을 먼저 암산한다 (원가 × (1+세율)).</a:t>
             </a:r>
             <a:endParaRPr lang="en-US" sz="1200" dirty="0"/>
           </a:p>
@@ -7527,7 +7527,7 @@
                 <a:ea typeface="Malgun Gothic" pitchFamily="34" charset="-122"/>
                 <a:cs typeface="Malgun Gothic" pitchFamily="34" charset="-120"/>
               </a:rPr>
-              <a:t>STEP 3 확인</a:t>
+              <a:t>STEP 3 실행 · 차트</a:t>
             </a:r>
             <a:endParaRPr lang="en-US" sz="1400" dirty="0"/>
           </a:p>
@@ -7542,7 +7542,7 @@
         <p:spPr>
           <a:xfrm>
             <a:off x="6096000" y="1874520"/>
-            <a:ext cx="2590800" cy="1097280"/>
+            <a:ext cx="2590800" cy="1417320"/>
           </a:xfrm>
           <a:prstGeom prst="rect">
             <a:avLst/>
@@ -7569,7 +7569,7 @@
                 <a:ea typeface="Malgun Gothic" pitchFamily="34" charset="-122"/>
                 <a:cs typeface="Malgun Gothic" pitchFamily="34" charset="-120"/>
               </a:rPr>
-              <a:t>차트의 원가 + 세금 = 최종 결제액이 계산과 같은지 본다.</a:t>
+              <a:t>「파이프라인 실행」 → 원가 + 세금 = 최종 결제액 막대. 암산과 같은지, 세율을 바꾸면 세금 막대만 변하는지 본다.</a:t>
             </a:r>
             <a:endParaRPr lang="en-US" sz="1200" dirty="0"/>
           </a:p>
